--- a/system-design-101/vi/lessons/sd-01-026/slides/sd-01-026.pptx
+++ b/system-design-101/vi/lessons/sd-01-026/slides/sd-01-026.pptx
@@ -4701,7 +4701,7 @@
               <a:t> phải</a:t>
             </a:r>
             <a:r>
-              <a:rPr lang="en-US" sz="2700" dirty="0" spc="1" kern="0">
+              <a:rPr lang="en-US" sz="2700" dirty="0" spc="8" kern="0">
                 <a:solidFill>
                   <a:srgbClr val="3B3A37"/>
                 </a:solidFill>
@@ -4709,21 +4709,10 @@
                 <a:ea typeface="Be Vietnam Pro" pitchFamily="34" charset="-122"/>
                 <a:cs typeface="Be Vietnam Pro" pitchFamily="34" charset="-120"/>
               </a:rPr>
-              <a:t> các</a:t>
-            </a:r>
-            <a:r>
-              <a:rPr lang="en-US" sz="2700" dirty="0" spc="9" kern="0">
-                <a:solidFill>
-                  <a:srgbClr val="3B3A37"/>
-                </a:solidFill>
-                <a:latin typeface="Be Vietnam Pro" pitchFamily="34" charset="0"/>
-                <a:ea typeface="Be Vietnam Pro" pitchFamily="34" charset="-122"/>
-                <a:cs typeface="Be Vietnam Pro" pitchFamily="34" charset="-120"/>
-              </a:rPr>
               <a:t> bước</a:t>
             </a:r>
             <a:r>
-              <a:rPr lang="en-US" sz="2700" dirty="0" spc="-3" kern="0">
+              <a:rPr lang="en-US" sz="2700" dirty="0" spc="-2" kern="0">
                 <a:solidFill>
                   <a:srgbClr val="3B3A37"/>
                 </a:solidFill>
@@ -12265,7 +12254,7 @@
               <a:t> đảm</a:t>
             </a:r>
             <a:r>
-              <a:rPr lang="en-US" sz="3000" dirty="0" spc="14" kern="0">
+              <a:rPr lang="en-US" sz="3000" dirty="0" spc="-11" kern="0">
                 <a:solidFill>
                   <a:srgbClr val="F3EEE3"/>
                 </a:solidFill>
@@ -12273,18 +12262,7 @@
                 <a:ea typeface="Be Vietnam Pro" pitchFamily="34" charset="-122"/>
                 <a:cs typeface="Be Vietnam Pro" pitchFamily="34" charset="-120"/>
               </a:rPr>
-              <a:t> đến</a:t>
-            </a:r>
-            <a:r>
-              <a:rPr lang="en-US" sz="3000" dirty="0" spc="-1" kern="0">
-                <a:solidFill>
-                  <a:srgbClr val="F3EEE3"/>
-                </a:solidFill>
-                <a:latin typeface="Be Vietnam Pro" pitchFamily="34" charset="0"/>
-                <a:ea typeface="Be Vietnam Pro" pitchFamily="34" charset="-122"/>
-                <a:cs typeface="Be Vietnam Pro" pitchFamily="34" charset="-120"/>
-              </a:rPr>
-              <a:t> nơi.</a:t>
+              <a:t> tới.</a:t>
             </a:r>
             <a:endParaRPr lang="en-US" sz="3000" dirty="0"/>
           </a:p>
@@ -13189,7 +13167,7 @@
               <a:buNone/>
             </a:pPr>
             <a:r>
-              <a:rPr lang="en-US" sz="5400" dirty="0" spc="-11" kern="0">
+              <a:rPr lang="en-US" sz="5400" dirty="0" spc="-5" kern="0">
                 <a:solidFill>
                   <a:srgbClr val="14161C"/>
                 </a:solidFill>
@@ -13197,10 +13175,10 @@
                 <a:ea typeface="Bricolage Grotesque ExtraBold" pitchFamily="34" charset="-122"/>
                 <a:cs typeface="Bricolage Grotesque ExtraBold" pitchFamily="34" charset="-120"/>
               </a:rPr>
-              <a:t>Một</a:t>
-            </a:r>
-            <a:r>
-              <a:rPr lang="en-US" sz="5400" dirty="0" spc="21" kern="0">
+              <a:t>B, C,</a:t>
+            </a:r>
+            <a:r>
+              <a:rPr lang="en-US" sz="5400" dirty="0" spc="0" kern="0">
                 <a:solidFill>
                   <a:srgbClr val="14161C"/>
                 </a:solidFill>
@@ -13208,7 +13186,7 @@
                 <a:ea typeface="Bricolage Grotesque ExtraBold" pitchFamily="34" charset="-122"/>
                 <a:cs typeface="Bricolage Grotesque ExtraBold" pitchFamily="34" charset="-120"/>
               </a:rPr>
-              <a:t> địa</a:t>
+              <a:t> D</a:t>
             </a:r>
             <a:r>
               <a:rPr lang="en-US" sz="5400" dirty="0" spc="-2" kern="0">
@@ -13219,10 +13197,10 @@
                 <a:ea typeface="Bricolage Grotesque ExtraBold" pitchFamily="34" charset="-122"/>
                 <a:cs typeface="Bricolage Grotesque ExtraBold" pitchFamily="34" charset="-120"/>
               </a:rPr>
-              <a:t> chỉ dịch</a:t>
-            </a:r>
-            <a:r>
-              <a:rPr lang="en-US" sz="5400" dirty="0" spc="-3" kern="0">
+              <a:t> chung</a:t>
+            </a:r>
+            <a:r>
+              <a:rPr lang="en-US" sz="5400" dirty="0" spc="20" kern="0">
                 <a:solidFill>
                   <a:srgbClr val="14161C"/>
                 </a:solidFill>
@@ -13230,10 +13208,10 @@
                 <a:ea typeface="Bricolage Grotesque ExtraBold" pitchFamily="34" charset="-122"/>
                 <a:cs typeface="Bricolage Grotesque ExtraBold" pitchFamily="34" charset="-120"/>
               </a:rPr>
-              <a:t> vụ</a:t>
-            </a:r>
-            <a:r>
-              <a:rPr lang="en-US" sz="5400" dirty="0" spc="0" kern="0">
+              <a:t> địa</a:t>
+            </a:r>
+            <a:r>
+              <a:rPr lang="en-US" sz="5400" dirty="0" spc="7" kern="0">
                 <a:solidFill>
                   <a:srgbClr val="14161C"/>
                 </a:solidFill>
@@ -13241,10 +13219,10 @@
                 <a:ea typeface="Bricolage Grotesque ExtraBold" pitchFamily="34" charset="-122"/>
                 <a:cs typeface="Bricolage Grotesque ExtraBold" pitchFamily="34" charset="-120"/>
               </a:rPr>
-              <a:t> ở</a:t>
-            </a:r>
-            <a:r>
-              <a:rPr lang="en-US" sz="5400" dirty="0" spc="-5" kern="0">
+              <a:t> chỉ;</a:t>
+            </a:r>
+            <a:r>
+              <a:rPr lang="en-US" sz="5400" dirty="0" spc="-32" kern="0">
                 <a:solidFill>
                   <a:srgbClr val="14161C"/>
                 </a:solidFill>
@@ -13252,10 +13230,10 @@
                 <a:ea typeface="Bricolage Grotesque ExtraBold" pitchFamily="34" charset="-122"/>
                 <a:cs typeface="Bricolage Grotesque ExtraBold" pitchFamily="34" charset="-120"/>
               </a:rPr>
-              <a:t> B, C,</a:t>
-            </a:r>
-            <a:r>
-              <a:rPr lang="en-US" sz="5400" dirty="0" spc="9" kern="0">
+              <a:t> gói</a:t>
+            </a:r>
+            <a:r>
+              <a:rPr lang="en-US" sz="5400" dirty="0" spc="-50" kern="0">
                 <a:solidFill>
                   <a:srgbClr val="14161C"/>
                 </a:solidFill>
@@ -13263,10 +13241,10 @@
                 <a:ea typeface="Bricolage Grotesque ExtraBold" pitchFamily="34" charset="-122"/>
                 <a:cs typeface="Bricolage Grotesque ExtraBold" pitchFamily="34" charset="-120"/>
               </a:rPr>
-              <a:t> D;</a:t>
-            </a:r>
-            <a:r>
-              <a:rPr lang="en-US" sz="5400" dirty="0" spc="-2" kern="0">
+              <a:t> tới</a:t>
+            </a:r>
+            <a:r>
+              <a:rPr lang="en-US" sz="5400" dirty="0" spc="-1" kern="0">
                 <a:solidFill>
                   <a:srgbClr val="14161C"/>
                 </a:solidFill>
@@ -13274,10 +13252,10 @@
                 <a:ea typeface="Bricolage Grotesque ExtraBold" pitchFamily="34" charset="-122"/>
                 <a:cs typeface="Bricolage Grotesque ExtraBold" pitchFamily="34" charset="-120"/>
               </a:rPr>
-              <a:t> mỗi</a:t>
-            </a:r>
-            <a:r>
-              <a:rPr lang="en-US" sz="5400" dirty="0" spc="-33" kern="0">
+              <a:t> một.</a:t>
+            </a:r>
+            <a:r>
+              <a:rPr lang="en-US" sz="5400" dirty="0" spc="0" kern="0">
                 <a:solidFill>
                   <a:srgbClr val="14161C"/>
                 </a:solidFill>
@@ -13285,62 +13263,7 @@
                 <a:ea typeface="Bricolage Grotesque ExtraBold" pitchFamily="34" charset="-122"/>
                 <a:cs typeface="Bricolage Grotesque ExtraBold" pitchFamily="34" charset="-120"/>
               </a:rPr>
-              <a:t> gói</a:t>
-            </a:r>
-            <a:r>
-              <a:rPr lang="en-US" sz="5400" dirty="0" spc="-50" kern="0">
-                <a:solidFill>
-                  <a:srgbClr val="14161C"/>
-                </a:solidFill>
-                <a:latin typeface="Bricolage Grotesque ExtraBold" pitchFamily="34" charset="0"/>
-                <a:ea typeface="Bricolage Grotesque ExtraBold" pitchFamily="34" charset="-122"/>
-                <a:cs typeface="Bricolage Grotesque ExtraBold" pitchFamily="34" charset="-120"/>
-              </a:rPr>
-              <a:t> tới</a:t>
-            </a:r>
-            <a:r>
-              <a:rPr lang="en-US" sz="5400" dirty="0" spc="-11" kern="0">
-                <a:solidFill>
-                  <a:srgbClr val="14161C"/>
-                </a:solidFill>
-                <a:latin typeface="Bricolage Grotesque ExtraBold" pitchFamily="34" charset="0"/>
-                <a:ea typeface="Bricolage Grotesque ExtraBold" pitchFamily="34" charset="-122"/>
-                <a:cs typeface="Bricolage Grotesque ExtraBold" pitchFamily="34" charset="-120"/>
-              </a:rPr>
-              <a:t> một</a:t>
-            </a:r>
-            <a:r>
-              <a:rPr lang="en-US" sz="5400" dirty="0" spc="-22" kern="0">
-                <a:solidFill>
-                  <a:srgbClr val="14161C"/>
-                </a:solidFill>
-                <a:latin typeface="Bricolage Grotesque ExtraBold" pitchFamily="34" charset="0"/>
-                <a:ea typeface="Bricolage Grotesque ExtraBold" pitchFamily="34" charset="-122"/>
-                <a:cs typeface="Bricolage Grotesque ExtraBold" pitchFamily="34" charset="-120"/>
-              </a:rPr>
-              <a:t> nơi.</a:t>
-            </a:r>
-            <a:r>
-              <a:rPr lang="en-US" sz="5400" dirty="0" spc="2" kern="0">
-                <a:solidFill>
-                  <a:srgbClr val="14161C"/>
-                </a:solidFill>
-                <a:latin typeface="Bricolage Grotesque ExtraBold" pitchFamily="34" charset="0"/>
-                <a:ea typeface="Bricolage Grotesque ExtraBold" pitchFamily="34" charset="-122"/>
-                <a:cs typeface="Bricolage Grotesque ExtraBold" pitchFamily="34" charset="-120"/>
-              </a:rPr>
-              <a:t> Kiểu</a:t>
-            </a:r>
-            <a:r>
-              <a:rPr lang="en-US" sz="5400" dirty="0" spc="-33" kern="0">
-                <a:solidFill>
-                  <a:srgbClr val="14161C"/>
-                </a:solidFill>
-                <a:latin typeface="Bricolage Grotesque ExtraBold" pitchFamily="34" charset="0"/>
-                <a:ea typeface="Bricolage Grotesque ExtraBold" pitchFamily="34" charset="-122"/>
-                <a:cs typeface="Bricolage Grotesque ExtraBold" pitchFamily="34" charset="-120"/>
-              </a:rPr>
-              <a:t> nào?</a:t>
+              <a:t> Kiểu?</a:t>
             </a:r>
             <a:endParaRPr lang="en-US" sz="5400" dirty="0"/>
           </a:p>
@@ -13507,7 +13430,7 @@
               <a:buNone/>
             </a:pPr>
             <a:r>
-              <a:rPr lang="en-US" sz="2700" dirty="0" spc="0" kern="0">
+              <a:rPr lang="en-US" sz="2700" dirty="0" spc="-5" kern="0">
                 <a:solidFill>
                   <a:srgbClr val="14161C"/>
                 </a:solidFill>
@@ -13515,10 +13438,10 @@
                 <a:ea typeface="Be Vietnam Pro" pitchFamily="34" charset="-122"/>
                 <a:cs typeface="Be Vietnam Pro" pitchFamily="34" charset="-120"/>
               </a:rPr>
-              <a:t>Muốn</a:t>
-            </a:r>
-            <a:r>
-              <a:rPr lang="en-US" sz="2700" dirty="0" spc="-4" kern="0">
+              <a:t>B</a:t>
+            </a:r>
+            <a:r>
+              <a:rPr lang="en-US" sz="2700" dirty="0" spc="-17" kern="0">
                 <a:solidFill>
                   <a:srgbClr val="14161C"/>
                 </a:solidFill>
@@ -13526,10 +13449,10 @@
                 <a:ea typeface="Be Vietnam Pro" pitchFamily="34" charset="-122"/>
                 <a:cs typeface="Be Vietnam Pro" pitchFamily="34" charset="-120"/>
               </a:rPr>
-              <a:t> B</a:t>
-            </a:r>
-            <a:r>
-              <a:rPr lang="en-US" sz="2700" dirty="0" spc="-17" kern="0">
+              <a:t> và</a:t>
+            </a:r>
+            <a:r>
+              <a:rPr lang="en-US" sz="2700" dirty="0" spc="-1" kern="0">
                 <a:solidFill>
                   <a:srgbClr val="14161C"/>
                 </a:solidFill>
@@ -13537,10 +13460,10 @@
                 <a:ea typeface="Be Vietnam Pro" pitchFamily="34" charset="-122"/>
                 <a:cs typeface="Be Vietnam Pro" pitchFamily="34" charset="-120"/>
               </a:rPr>
-              <a:t> và</a:t>
-            </a:r>
-            <a:r>
-              <a:rPr lang="en-US" sz="2700" dirty="0" spc="-1" kern="0">
+              <a:t> D</a:t>
+            </a:r>
+            <a:r>
+              <a:rPr lang="en-US" sz="2700" dirty="0" spc="-2" kern="0">
                 <a:solidFill>
                   <a:srgbClr val="14161C"/>
                 </a:solidFill>
@@ -13548,10 +13471,10 @@
                 <a:ea typeface="Be Vietnam Pro" pitchFamily="34" charset="-122"/>
                 <a:cs typeface="Be Vietnam Pro" pitchFamily="34" charset="-120"/>
               </a:rPr>
-              <a:t> D</a:t>
-            </a:r>
-            <a:r>
-              <a:rPr lang="en-US" sz="2700" dirty="0" spc="12" kern="0">
+              <a:t> cùng nhận</a:t>
+            </a:r>
+            <a:r>
+              <a:rPr lang="en-US" sz="2700" dirty="0" spc="-15" kern="0">
                 <a:solidFill>
                   <a:srgbClr val="14161C"/>
                 </a:solidFill>
@@ -13559,10 +13482,10 @@
                 <a:ea typeface="Be Vietnam Pro" pitchFamily="34" charset="-122"/>
                 <a:cs typeface="Be Vietnam Pro" pitchFamily="34" charset="-120"/>
               </a:rPr>
-              <a:t> đều</a:t>
-            </a:r>
-            <a:r>
-              <a:rPr lang="en-US" sz="2700" dirty="0" spc="-2" kern="0">
+              <a:t> gói</a:t>
+            </a:r>
+            <a:r>
+              <a:rPr lang="en-US" sz="2700" dirty="0" spc="42" kern="0">
                 <a:solidFill>
                   <a:srgbClr val="14161C"/>
                 </a:solidFill>
@@ -13570,10 +13493,10 @@
                 <a:ea typeface="Be Vietnam Pro" pitchFamily="34" charset="-122"/>
                 <a:cs typeface="Be Vietnam Pro" pitchFamily="34" charset="-120"/>
               </a:rPr>
-              <a:t> nhận</a:t>
-            </a:r>
-            <a:r>
-              <a:rPr lang="en-US" sz="2700" dirty="0" spc="-15" kern="0">
+              <a:t> gửi</a:t>
+            </a:r>
+            <a:r>
+              <a:rPr lang="en-US" sz="2700" dirty="0" spc="-3" kern="0">
                 <a:solidFill>
                   <a:srgbClr val="14161C"/>
                 </a:solidFill>
@@ -13581,51 +13504,7 @@
                 <a:ea typeface="Be Vietnam Pro" pitchFamily="34" charset="-122"/>
                 <a:cs typeface="Be Vietnam Pro" pitchFamily="34" charset="-120"/>
               </a:rPr>
-              <a:t> gói</a:t>
-            </a:r>
-            <a:r>
-              <a:rPr lang="en-US" sz="2700" dirty="0" spc="41" kern="0">
-                <a:solidFill>
-                  <a:srgbClr val="14161C"/>
-                </a:solidFill>
-                <a:latin typeface="Be Vietnam Pro" pitchFamily="34" charset="0"/>
-                <a:ea typeface="Be Vietnam Pro" pitchFamily="34" charset="-122"/>
-                <a:cs typeface="Be Vietnam Pro" pitchFamily="34" charset="-120"/>
-              </a:rPr>
-              <a:t> gửi</a:t>
-            </a:r>
-            <a:r>
-              <a:rPr lang="en-US" sz="2700" dirty="0" spc="-2" kern="0">
-                <a:solidFill>
-                  <a:srgbClr val="14161C"/>
-                </a:solidFill>
-                <a:latin typeface="Be Vietnam Pro" pitchFamily="34" charset="0"/>
-                <a:ea typeface="Be Vietnam Pro" pitchFamily="34" charset="-122"/>
-                <a:cs typeface="Be Vietnam Pro" pitchFamily="34" charset="-120"/>
-              </a:rPr>
               <a:t> nhóm:</a:t>
-            </a:r>
-            <a:r>
-              <a:rPr lang="en-US" sz="2700" dirty="0" spc="15" kern="0">
-                <a:solidFill>
-                  <a:srgbClr val="14161C"/>
-                </a:solidFill>
-                <a:latin typeface="Be Vietnam Pro" pitchFamily="34" charset="0"/>
-                <a:ea typeface="Be Vietnam Pro" pitchFamily="34" charset="-122"/>
-                <a:cs typeface="Be Vietnam Pro" pitchFamily="34" charset="-120"/>
-              </a:rPr>
-              <a:t> đó</a:t>
-            </a:r>
-            <a:r>
-              <a:rPr lang="en-US" sz="2700" dirty="0" spc="0" kern="0">
-                <a:solidFill>
-                  <a:srgbClr val="14161C"/>
-                </a:solidFill>
-                <a:latin typeface="Be Vietnam Pro" pitchFamily="34" charset="0"/>
-                <a:ea typeface="Be Vietnam Pro" pitchFamily="34" charset="-122"/>
-                <a:cs typeface="Be Vietnam Pro" pitchFamily="34" charset="-120"/>
-              </a:rPr>
-              <a:t> là</a:t>
             </a:r>
             <a:r>
               <a:rPr lang="en-US" sz="2700" dirty="0" spc="-2" kern="0">
@@ -14459,10 +14338,10 @@
                 <a:ea typeface="Be Vietnam Pro" pitchFamily="34" charset="-122"/>
                 <a:cs typeface="Be Vietnam Pro" pitchFamily="34" charset="-120"/>
               </a:rPr>
-              <a:t> giao diện mạng, không</a:t>
-            </a:r>
-            <a:r>
-              <a:rPr lang="en-US" sz="2550" dirty="0" spc="1" kern="0">
+              <a:t> giao diện mạng, không phải</a:t>
+            </a:r>
+            <a:r>
+              <a:rPr lang="en-US" sz="2550" dirty="0" spc="-15" kern="0">
                 <a:solidFill>
                   <a:srgbClr val="14161C"/>
                 </a:solidFill>
@@ -14470,10 +14349,10 @@
                 <a:ea typeface="Be Vietnam Pro" pitchFamily="34" charset="-122"/>
                 <a:cs typeface="Be Vietnam Pro" pitchFamily="34" charset="-120"/>
               </a:rPr>
-              <a:t> khẳng</a:t>
-            </a:r>
-            <a:r>
-              <a:rPr lang="en-US" sz="2550" dirty="0" spc="21" kern="0">
+              <a:t> với</a:t>
+            </a:r>
+            <a:r>
+              <a:rPr lang="en-US" sz="2550" dirty="0" spc="-6" kern="0">
                 <a:solidFill>
                   <a:srgbClr val="14161C"/>
                 </a:solidFill>
@@ -14481,62 +14360,7 @@
                 <a:ea typeface="Be Vietnam Pro" pitchFamily="34" charset="-122"/>
                 <a:cs typeface="Be Vietnam Pro" pitchFamily="34" charset="-120"/>
               </a:rPr>
-              <a:t> định</a:t>
-            </a:r>
-            <a:r>
-              <a:rPr lang="en-US" sz="2550" dirty="0" spc="-5" kern="0">
-                <a:solidFill>
-                  <a:srgbClr val="14161C"/>
-                </a:solidFill>
-                <a:latin typeface="Be Vietnam Pro" pitchFamily="34" charset="0"/>
-                <a:ea typeface="Be Vietnam Pro" pitchFamily="34" charset="-122"/>
-                <a:cs typeface="Be Vietnam Pro" pitchFamily="34" charset="-120"/>
-              </a:rPr>
-              <a:t> một</a:t>
-            </a:r>
-            <a:r>
-              <a:rPr lang="en-US" sz="2550" dirty="0" spc="-9" kern="0">
-                <a:solidFill>
-                  <a:srgbClr val="14161C"/>
-                </a:solidFill>
-                <a:latin typeface="Be Vietnam Pro" pitchFamily="34" charset="0"/>
-                <a:ea typeface="Be Vietnam Pro" pitchFamily="34" charset="-122"/>
-                <a:cs typeface="Be Vietnam Pro" pitchFamily="34" charset="-120"/>
-              </a:rPr>
-              <a:t> máy</a:t>
-            </a:r>
-            <a:r>
-              <a:rPr lang="en-US" sz="2550" dirty="0" spc="-5" kern="0">
-                <a:solidFill>
-                  <a:srgbClr val="14161C"/>
-                </a:solidFill>
-                <a:latin typeface="Be Vietnam Pro" pitchFamily="34" charset="0"/>
-                <a:ea typeface="Be Vietnam Pro" pitchFamily="34" charset="-122"/>
-                <a:cs typeface="Be Vietnam Pro" pitchFamily="34" charset="-120"/>
-              </a:rPr>
-              <a:t> một</a:t>
-            </a:r>
-            <a:r>
-              <a:rPr lang="en-US" sz="2550" dirty="0" spc="26" kern="0">
-                <a:solidFill>
-                  <a:srgbClr val="14161C"/>
-                </a:solidFill>
-                <a:latin typeface="Be Vietnam Pro" pitchFamily="34" charset="0"/>
-                <a:ea typeface="Be Vietnam Pro" pitchFamily="34" charset="-122"/>
-                <a:cs typeface="Be Vietnam Pro" pitchFamily="34" charset="-120"/>
-              </a:rPr>
-              <a:t> địa</a:t>
-            </a:r>
-            <a:r>
-              <a:rPr lang="en-US" sz="2550" dirty="0" spc="1" kern="0">
-                <a:solidFill>
-                  <a:srgbClr val="14161C"/>
-                </a:solidFill>
-                <a:latin typeface="Be Vietnam Pro" pitchFamily="34" charset="0"/>
-                <a:ea typeface="Be Vietnam Pro" pitchFamily="34" charset="-122"/>
-                <a:cs typeface="Be Vietnam Pro" pitchFamily="34" charset="-120"/>
-              </a:rPr>
-              <a:t> chỉ.</a:t>
+              <a:t> máy.</a:t>
             </a:r>
             <a:endParaRPr lang="en-US" sz="2550" dirty="0"/>
           </a:p>
@@ -15065,7 +14889,7 @@
               <a:t>Đổi</a:t>
             </a:r>
             <a:r>
-              <a:rPr lang="en-US" sz="2550" dirty="0" spc="6" kern="0">
+              <a:rPr lang="en-US" sz="2550" dirty="0" spc="4" kern="0">
                 <a:solidFill>
                   <a:srgbClr val="14161C"/>
                 </a:solidFill>
@@ -15073,10 +14897,10 @@
                 <a:ea typeface="Be Vietnam Pro" pitchFamily="34" charset="-122"/>
                 <a:cs typeface="Be Vietnam Pro" pitchFamily="34" charset="-120"/>
               </a:rPr>
-              <a:t> đường</a:t>
-            </a:r>
-            <a:r>
-              <a:rPr lang="en-US" sz="2550" dirty="0" spc="33" kern="0">
+              <a:t> đường,</a:t>
+            </a:r>
+            <a:r>
+              <a:rPr lang="en-US" sz="2550" dirty="0" spc="13" kern="0">
                 <a:solidFill>
                   <a:srgbClr val="14161C"/>
                 </a:solidFill>
@@ -15084,7 +14908,7 @@
                 <a:ea typeface="Be Vietnam Pro" pitchFamily="34" charset="-122"/>
                 <a:cs typeface="Be Vietnam Pro" pitchFamily="34" charset="-120"/>
               </a:rPr>
-              <a:t> đi</a:t>
+              <a:t> đổi</a:t>
             </a:r>
             <a:r>
               <a:rPr lang="en-US" sz="2550" dirty="0" spc="-1" kern="0">
@@ -15095,10 +14919,10 @@
                 <a:ea typeface="Be Vietnam Pro" pitchFamily="34" charset="-122"/>
                 <a:cs typeface="Be Vietnam Pro" pitchFamily="34" charset="-120"/>
               </a:rPr>
-              <a:t> có</a:t>
-            </a:r>
-            <a:r>
-              <a:rPr lang="en-US" sz="2550" dirty="0" spc="2" kern="0">
+              <a:t> nơi</a:t>
+            </a:r>
+            <a:r>
+              <a:rPr lang="en-US" sz="2550" dirty="0" spc="0" kern="0">
                 <a:solidFill>
                   <a:srgbClr val="14161C"/>
                 </a:solidFill>
@@ -15106,10 +14930,10 @@
                 <a:ea typeface="Be Vietnam Pro" pitchFamily="34" charset="-122"/>
                 <a:cs typeface="Be Vietnam Pro" pitchFamily="34" charset="-120"/>
               </a:rPr>
-              <a:t> thể</a:t>
-            </a:r>
-            <a:r>
-              <a:rPr lang="en-US" sz="2550" dirty="0" spc="12" kern="0">
+              <a:t> nhận:</a:t>
+            </a:r>
+            <a:r>
+              <a:rPr lang="en-US" sz="2550" dirty="0" spc="1" kern="0">
                 <a:solidFill>
                   <a:srgbClr val="14161C"/>
                 </a:solidFill>
@@ -15117,10 +14941,10 @@
                 <a:ea typeface="Be Vietnam Pro" pitchFamily="34" charset="-122"/>
                 <a:cs typeface="Be Vietnam Pro" pitchFamily="34" charset="-120"/>
               </a:rPr>
-              <a:t> đổi</a:t>
-            </a:r>
-            <a:r>
-              <a:rPr lang="en-US" sz="2550" dirty="0" spc="-1" kern="0">
+              <a:t> cân</a:t>
+            </a:r>
+            <a:r>
+              <a:rPr lang="en-US" sz="2550" dirty="0" spc="0" kern="0">
                 <a:solidFill>
                   <a:srgbClr val="14161C"/>
                 </a:solidFill>
@@ -15128,10 +14952,10 @@
                 <a:ea typeface="Be Vietnam Pro" pitchFamily="34" charset="-122"/>
                 <a:cs typeface="Be Vietnam Pro" pitchFamily="34" charset="-120"/>
               </a:rPr>
-              <a:t> nơi</a:t>
-            </a:r>
-            <a:r>
-              <a:rPr lang="en-US" sz="2550" dirty="0" spc="0" kern="0">
+              <a:t> nhắc giao dịch</a:t>
+            </a:r>
+            <a:r>
+              <a:rPr lang="en-US" sz="2550" dirty="0" spc="1" kern="0">
                 <a:solidFill>
                   <a:srgbClr val="14161C"/>
                 </a:solidFill>
@@ -15139,18 +14963,7 @@
                 <a:ea typeface="Be Vietnam Pro" pitchFamily="34" charset="-122"/>
                 <a:cs typeface="Be Vietnam Pro" pitchFamily="34" charset="-120"/>
               </a:rPr>
-              <a:t> nhận: cân nhắc giao</a:t>
-            </a:r>
-            <a:r>
-              <a:rPr lang="en-US" sz="2550" dirty="0" spc="1" kern="0">
-                <a:solidFill>
-                  <a:srgbClr val="14161C"/>
-                </a:solidFill>
-                <a:latin typeface="Be Vietnam Pro" pitchFamily="34" charset="0"/>
-                <a:ea typeface="Be Vietnam Pro" pitchFamily="34" charset="-122"/>
-                <a:cs typeface="Be Vietnam Pro" pitchFamily="34" charset="-120"/>
-              </a:rPr>
-              <a:t> dịch dài.</a:t>
+              <a:t> dài.</a:t>
             </a:r>
             <a:endParaRPr lang="en-US" sz="2550" dirty="0"/>
           </a:p>

--- a/system-design-101/vi/lessons/sd-01-026/slides/sd-01-026.pptx
+++ b/system-design-101/vi/lessons/sd-01-026/slides/sd-01-026.pptx
@@ -1794,7 +1794,7 @@
         <p:spPr>
           <a:xfrm>
             <a:off x="914400" y="1524000"/>
-            <a:ext cx="8572500" cy="3810000"/>
+            <a:ext cx="8572500" cy="4972050"/>
           </a:xfrm>
           <a:prstGeom prst="rect">
             <a:avLst/>
@@ -1803,17 +1803,17 @@
           <a:ln/>
         </p:spPr>
         <p:txBody>
-          <a:bodyPr wrap="square" lIns="0" tIns="64008" rIns="0" bIns="-64008" rtlCol="0" anchor="t"/>
+          <a:bodyPr wrap="square" lIns="0" tIns="72009" rIns="0" bIns="-72009" rtlCol="0" anchor="t"/>
           <a:lstStyle/>
           <a:p>
             <a:pPr algn="l" indent="0" marL="0">
               <a:lnSpc>
-                <a:spcPts val="7488"/>
+                <a:spcPts val="8424"/>
               </a:lnSpc>
               <a:buNone/>
             </a:pPr>
             <a:r>
-              <a:rPr lang="en-US" sz="7200" dirty="0" spc="9" kern="0">
+              <a:rPr lang="en-US" sz="8100" dirty="0" spc="11" kern="0">
                 <a:solidFill>
                   <a:srgbClr val="F3EEE3"/>
                 </a:solidFill>
@@ -1824,7 +1824,7 @@
               <a:t>Unicast,</a:t>
             </a:r>
             <a:r>
-              <a:rPr lang="en-US" sz="7200" dirty="0" spc="-3" kern="0">
+              <a:rPr lang="en-US" sz="8100" dirty="0" spc="-1" kern="0">
                 <a:solidFill>
                   <a:srgbClr val="F3EEE3"/>
                 </a:solidFill>
@@ -1835,7 +1835,7 @@
               <a:t> broadcast,</a:t>
             </a:r>
             <a:r>
-              <a:rPr lang="en-US" sz="7200" dirty="0" spc="2" kern="0">
+              <a:rPr lang="en-US" sz="8100" dirty="0" spc="3" kern="0">
                 <a:solidFill>
                   <a:srgbClr val="F3EEE3"/>
                 </a:solidFill>
@@ -1846,7 +1846,7 @@
               <a:t> multicast</a:t>
             </a:r>
             <a:r>
-              <a:rPr lang="en-US" sz="7200" dirty="0" spc="-77" kern="0">
+              <a:rPr lang="en-US" sz="8100" dirty="0" spc="-87" kern="0">
                 <a:solidFill>
                   <a:srgbClr val="F3EEE3"/>
                 </a:solidFill>
@@ -1857,7 +1857,7 @@
               <a:t> và</a:t>
             </a:r>
             <a:r>
-              <a:rPr lang="en-US" sz="7200" dirty="0" spc="1" kern="0">
+              <a:rPr lang="en-US" sz="8100" dirty="0" spc="2" kern="0">
                 <a:solidFill>
                   <a:srgbClr val="F3EEE3"/>
                 </a:solidFill>
@@ -1867,7 +1867,7 @@
               </a:rPr>
               <a:t> anycast</a:t>
             </a:r>
-            <a:endParaRPr lang="en-US" sz="7200" dirty="0"/>
+            <a:endParaRPr lang="en-US" sz="8100" dirty="0"/>
           </a:p>
         </p:txBody>
       </p:sp>
@@ -1879,8 +1879,8 @@
         </p:nvSpPr>
         <p:spPr>
           <a:xfrm>
-            <a:off x="914400" y="4191000"/>
-            <a:ext cx="8382000" cy="1047750"/>
+            <a:off x="914400" y="6286500"/>
+            <a:ext cx="8382000" cy="571500"/>
           </a:xfrm>
           <a:prstGeom prst="rect">
             <a:avLst/>
@@ -1998,7 +1998,7 @@
         </p:nvSpPr>
         <p:spPr>
           <a:xfrm>
-            <a:off x="914400" y="5524500"/>
+            <a:off x="914400" y="7143750"/>
             <a:ext cx="8420100" cy="0"/>
           </a:xfrm>
           <a:prstGeom prst="line">
@@ -2023,7 +2023,7 @@
         </p:nvSpPr>
         <p:spPr>
           <a:xfrm>
-            <a:off x="914400" y="5829300"/>
+            <a:off x="914400" y="7429500"/>
             <a:ext cx="8382000" cy="457200"/>
           </a:xfrm>
           <a:prstGeom prst="rect">

--- a/system-design-101/vi/lessons/sd-01-026/slides/sd-01-026.pptx
+++ b/system-design-101/vi/lessons/sd-01-026/slides/sd-01-026.pptx
@@ -13147,8 +13147,8 @@
         </p:nvSpPr>
         <p:spPr>
           <a:xfrm>
-            <a:off x="914400" y="1524000"/>
-            <a:ext cx="16459200" cy="1905000"/>
+            <a:off x="914400" y="1390650"/>
+            <a:ext cx="16459200" cy="2047875"/>
           </a:xfrm>
           <a:prstGeom prst="rect">
             <a:avLst/>
@@ -13157,17 +13157,17 @@
           <a:ln/>
         </p:spPr>
         <p:txBody>
-          <a:bodyPr wrap="square" lIns="0" tIns="34290" rIns="0" bIns="-34290" rtlCol="0" anchor="t"/>
+          <a:bodyPr wrap="square" lIns="0" tIns="43815" rIns="0" bIns="-43815" rtlCol="0" anchor="t"/>
           <a:lstStyle/>
           <a:p>
             <a:pPr algn="l" indent="0" marL="0">
               <a:lnSpc>
-                <a:spcPts val="5940"/>
+                <a:spcPts val="7590"/>
               </a:lnSpc>
               <a:buNone/>
             </a:pPr>
             <a:r>
-              <a:rPr lang="en-US" sz="5400" dirty="0" spc="-5" kern="0">
+              <a:rPr lang="en-US" sz="6900" dirty="0" spc="-12" kern="0">
                 <a:solidFill>
                   <a:srgbClr val="14161C"/>
                 </a:solidFill>
@@ -13175,10 +13175,10 @@
                 <a:ea typeface="Bricolage Grotesque ExtraBold" pitchFamily="34" charset="-122"/>
                 <a:cs typeface="Bricolage Grotesque ExtraBold" pitchFamily="34" charset="-120"/>
               </a:rPr>
-              <a:t>B, C,</a:t>
-            </a:r>
-            <a:r>
-              <a:rPr lang="en-US" sz="5400" dirty="0" spc="0" kern="0">
+              <a:t>B,</a:t>
+            </a:r>
+            <a:r>
+              <a:rPr lang="en-US" sz="6900" dirty="0" spc="-5" kern="0">
                 <a:solidFill>
                   <a:srgbClr val="14161C"/>
                 </a:solidFill>
@@ -13186,10 +13186,10 @@
                 <a:ea typeface="Bricolage Grotesque ExtraBold" pitchFamily="34" charset="-122"/>
                 <a:cs typeface="Bricolage Grotesque ExtraBold" pitchFamily="34" charset="-120"/>
               </a:rPr>
-              <a:t> D</a:t>
-            </a:r>
-            <a:r>
-              <a:rPr lang="en-US" sz="5400" dirty="0" spc="-2" kern="0">
+              <a:t> C,</a:t>
+            </a:r>
+            <a:r>
+              <a:rPr lang="en-US" sz="6900" dirty="0" spc="-1" kern="0">
                 <a:solidFill>
                   <a:srgbClr val="14161C"/>
                 </a:solidFill>
@@ -13197,10 +13197,10 @@
                 <a:ea typeface="Bricolage Grotesque ExtraBold" pitchFamily="34" charset="-122"/>
                 <a:cs typeface="Bricolage Grotesque ExtraBold" pitchFamily="34" charset="-120"/>
               </a:rPr>
-              <a:t> chung</a:t>
-            </a:r>
-            <a:r>
-              <a:rPr lang="en-US" sz="5400" dirty="0" spc="20" kern="0">
+              <a:t> D</a:t>
+            </a:r>
+            <a:r>
+              <a:rPr lang="en-US" sz="6900" dirty="0" spc="1" kern="0">
                 <a:solidFill>
                   <a:srgbClr val="14161C"/>
                 </a:solidFill>
@@ -13208,10 +13208,10 @@
                 <a:ea typeface="Bricolage Grotesque ExtraBold" pitchFamily="34" charset="-122"/>
                 <a:cs typeface="Bricolage Grotesque ExtraBold" pitchFamily="34" charset="-120"/>
               </a:rPr>
-              <a:t> địa</a:t>
-            </a:r>
-            <a:r>
-              <a:rPr lang="en-US" sz="5400" dirty="0" spc="7" kern="0">
+              <a:t> chung</a:t>
+            </a:r>
+            <a:r>
+              <a:rPr lang="en-US" sz="6900" dirty="0" spc="26" kern="0">
                 <a:solidFill>
                   <a:srgbClr val="14161C"/>
                 </a:solidFill>
@@ -13219,10 +13219,10 @@
                 <a:ea typeface="Bricolage Grotesque ExtraBold" pitchFamily="34" charset="-122"/>
                 <a:cs typeface="Bricolage Grotesque ExtraBold" pitchFamily="34" charset="-120"/>
               </a:rPr>
-              <a:t> chỉ;</a:t>
-            </a:r>
-            <a:r>
-              <a:rPr lang="en-US" sz="5400" dirty="0" spc="-32" kern="0">
+              <a:t> địa</a:t>
+            </a:r>
+            <a:r>
+              <a:rPr lang="en-US" sz="6900" dirty="0" spc="12" kern="0">
                 <a:solidFill>
                   <a:srgbClr val="14161C"/>
                 </a:solidFill>
@@ -13230,10 +13230,10 @@
                 <a:ea typeface="Bricolage Grotesque ExtraBold" pitchFamily="34" charset="-122"/>
                 <a:cs typeface="Bricolage Grotesque ExtraBold" pitchFamily="34" charset="-120"/>
               </a:rPr>
-              <a:t> gói</a:t>
-            </a:r>
-            <a:r>
-              <a:rPr lang="en-US" sz="5400" dirty="0" spc="-50" kern="0">
+              <a:t> chỉ;</a:t>
+            </a:r>
+            <a:r>
+              <a:rPr lang="en-US" sz="6900" dirty="0" spc="-41" kern="0">
                 <a:solidFill>
                   <a:srgbClr val="14161C"/>
                 </a:solidFill>
@@ -13241,10 +13241,10 @@
                 <a:ea typeface="Bricolage Grotesque ExtraBold" pitchFamily="34" charset="-122"/>
                 <a:cs typeface="Bricolage Grotesque ExtraBold" pitchFamily="34" charset="-120"/>
               </a:rPr>
-              <a:t> tới</a:t>
-            </a:r>
-            <a:r>
-              <a:rPr lang="en-US" sz="5400" dirty="0" spc="-1" kern="0">
+              <a:t> gói</a:t>
+            </a:r>
+            <a:r>
+              <a:rPr lang="en-US" sz="6900" dirty="0" spc="-63" kern="0">
                 <a:solidFill>
                   <a:srgbClr val="14161C"/>
                 </a:solidFill>
@@ -13252,10 +13252,10 @@
                 <a:ea typeface="Bricolage Grotesque ExtraBold" pitchFamily="34" charset="-122"/>
                 <a:cs typeface="Bricolage Grotesque ExtraBold" pitchFamily="34" charset="-120"/>
               </a:rPr>
-              <a:t> một.</a:t>
-            </a:r>
-            <a:r>
-              <a:rPr lang="en-US" sz="5400" dirty="0" spc="0" kern="0">
+              <a:t> tới</a:t>
+            </a:r>
+            <a:r>
+              <a:rPr lang="en-US" sz="6900" dirty="0" spc="1" kern="0">
                 <a:solidFill>
                   <a:srgbClr val="14161C"/>
                 </a:solidFill>
@@ -13263,9 +13263,20 @@
                 <a:ea typeface="Bricolage Grotesque ExtraBold" pitchFamily="34" charset="-122"/>
                 <a:cs typeface="Bricolage Grotesque ExtraBold" pitchFamily="34" charset="-120"/>
               </a:rPr>
+              <a:t> một.</a:t>
+            </a:r>
+            <a:r>
+              <a:rPr lang="en-US" sz="6900" dirty="0" spc="2" kern="0">
+                <a:solidFill>
+                  <a:srgbClr val="14161C"/>
+                </a:solidFill>
+                <a:latin typeface="Bricolage Grotesque ExtraBold" pitchFamily="34" charset="0"/>
+                <a:ea typeface="Bricolage Grotesque ExtraBold" pitchFamily="34" charset="-122"/>
+                <a:cs typeface="Bricolage Grotesque ExtraBold" pitchFamily="34" charset="-120"/>
+              </a:rPr>
               <a:t> Kiểu?</a:t>
             </a:r>
-            <a:endParaRPr lang="en-US" sz="5400" dirty="0"/>
+            <a:endParaRPr lang="en-US" sz="6900" dirty="0"/>
           </a:p>
         </p:txBody>
       </p:sp>
